--- a/catalog/samples/chart_insight.pptx
+++ b/catalog/samples/chart_insight.pptx
@@ -1402,7 +1402,7 @@
           </a:p>
           <a:p>
             <a:r>
-              <a:t>  "template_sha256": "2dc662754e058f5519a5303a025327453a6ed47570b919333e7eaf872e73f99c"</a:t>
+              <a:t>  "template_sha256": "fdfa721d34bbff4e176b9c780a3b24226e6c976de84583ae3ac9bf5733945955"</a:t>
             </a:r>
           </a:p>
           <a:p>
